--- a/6-lesson/presentation/Presentation Java.pptx
+++ b/6-lesson/presentation/Presentation Java.pptx
@@ -8642,7 +8642,7 @@
         </p:nvSpPr>
         <p:spPr>
           <a:xfrm>
-            <a:off x="1887220" y="463550"/>
+            <a:off x="1899285" y="463550"/>
             <a:ext cx="8410575" cy="949325"/>
           </a:xfrm>
           <a:prstGeom prst="rect">
